--- a/06_documentation/presentation.pptx
+++ b/06_documentation/presentation.pptx
@@ -3476,7 +3476,7 @@
                         </a:defRPr>
                       </a:pPr>
                       <a:r>
-                        <a:t>Processing time</a:t>
+                        <a:t>Otsu time</a:t>
                       </a:r>
                     </a:p>
                   </a:txBody>
@@ -3499,7 +3499,7 @@
                         </a:defRPr>
                       </a:pPr>
                       <a:r>
-                        <a:t>~18 ms</a:t>
+                        <a:t>~20 ms (MB)</a:t>
                       </a:r>
                     </a:p>
                   </a:txBody>
@@ -3522,7 +3522,7 @@
                         </a:defRPr>
                       </a:pPr>
                       <a:r>
-                        <a:t>~2 ms</a:t>
+                        <a:t>~3.4 ms (best)</a:t>
                       </a:r>
                     </a:p>
                   </a:txBody>
@@ -3545,7 +3545,7 @@
                         </a:defRPr>
                       </a:pPr>
                       <a:r>
-                        <a:t>8.9× speedup</a:t>
+                        <a:t>~5.9× speedup</a:t>
                       </a:r>
                     </a:p>
                   </a:txBody>
@@ -3593,7 +3593,7 @@
                         </a:defRPr>
                       </a:pPr>
                       <a:r>
-                        <a:t>15 W</a:t>
+                        <a:t>200 mW</a:t>
                       </a:r>
                     </a:p>
                   </a:txBody>
@@ -3616,7 +3616,7 @@
                         </a:defRPr>
                       </a:pPr>
                       <a:r>
-                        <a:t>0.7 W</a:t>
+                        <a:t>50 mW</a:t>
                       </a:r>
                     </a:p>
                   </a:txBody>
@@ -3639,7 +3639,7 @@
                         </a:defRPr>
                       </a:pPr>
                       <a:r>
-                        <a:t>21× lower</a:t>
+                        <a:t>4× lower</a:t>
                       </a:r>
                     </a:p>
                   </a:txBody>
@@ -3687,7 +3687,7 @@
                         </a:defRPr>
                       </a:pPr>
                       <a:r>
-                        <a:t>~270 mJ</a:t>
+                        <a:t>~4,000 µJ</a:t>
                       </a:r>
                     </a:p>
                   </a:txBody>
@@ -3710,7 +3710,7 @@
                         </a:defRPr>
                       </a:pPr>
                       <a:r>
-                        <a:t>~1.4 mJ</a:t>
+                        <a:t>~169 µJ</a:t>
                       </a:r>
                     </a:p>
                   </a:txBody>
@@ -3733,7 +3733,7 @@
                         </a:defRPr>
                       </a:pPr>
                       <a:r>
-                        <a:t>&gt;99% savings</a:t>
+                        <a:t>~95.8% savings</a:t>
                       </a:r>
                     </a:p>
                   </a:txBody>
@@ -4147,7 +4147,7 @@
               </a:defRPr>
             </a:pPr>
             <a:r>
-              <a:t>✅ ~8.9× speedup, &gt;99% energy savings vs software</a:t>
+              <a:t>✅ ~5.9× speedup, ~95.8% energy savings (SoC-fair baseline)</a:t>
             </a:r>
           </a:p>
           <a:p>
@@ -6297,7 +6297,7 @@
                         </a:defRPr>
                       </a:pPr>
                       <a:r>
-                        <a:t>~7,600</a:t>
+                        <a:t>30,969</a:t>
                       </a:r>
                     </a:p>
                   </a:txBody>
@@ -6343,7 +6343,7 @@
                         </a:defRPr>
                       </a:pPr>
                       <a:r>
-                        <a:t>~12%</a:t>
+                        <a:t>48%</a:t>
                       </a:r>
                     </a:p>
                   </a:txBody>
@@ -6391,7 +6391,7 @@
                         </a:defRPr>
                       </a:pPr>
                       <a:r>
-                        <a:t>~3,800</a:t>
+                        <a:t>33,247</a:t>
                       </a:r>
                     </a:p>
                   </a:txBody>
@@ -6437,7 +6437,7 @@
                         </a:defRPr>
                       </a:pPr>
                       <a:r>
-                        <a:t>~3%</a:t>
+                        <a:t>26%</a:t>
                       </a:r>
                     </a:p>
                   </a:txBody>
@@ -6462,7 +6462,7 @@
                         </a:defRPr>
                       </a:pPr>
                       <a:r>
-                        <a:t>BRAM</a:t>
+                        <a:t>BRAM_18K</a:t>
                       </a:r>
                     </a:p>
                   </a:txBody>
@@ -6485,7 +6485,7 @@
                         </a:defRPr>
                       </a:pPr>
                       <a:r>
-                        <a:t>5.5</a:t>
+                        <a:t>168</a:t>
                       </a:r>
                     </a:p>
                   </a:txBody>
@@ -6508,7 +6508,7 @@
                         </a:defRPr>
                       </a:pPr>
                       <a:r>
-                        <a:t>135</a:t>
+                        <a:t>270</a:t>
                       </a:r>
                     </a:p>
                   </a:txBody>
@@ -6531,7 +6531,7 @@
                         </a:defRPr>
                       </a:pPr>
                       <a:r>
-                        <a:t>~4%</a:t>
+                        <a:t>62%</a:t>
                       </a:r>
                     </a:p>
                   </a:txBody>
@@ -6579,7 +6579,7 @@
                         </a:defRPr>
                       </a:pPr>
                       <a:r>
-                        <a:t>7</a:t>
+                        <a:t>163</a:t>
                       </a:r>
                     </a:p>
                   </a:txBody>
@@ -6625,7 +6625,7 @@
                         </a:defRPr>
                       </a:pPr>
                       <a:r>
-                        <a:t>~3%</a:t>
+                        <a:t>67%</a:t>
                       </a:r>
                     </a:p>
                   </a:txBody>
